--- a/curriculum/M01/W01/L03/slides.pptx
+++ b/curriculum/M01/W01/L03/slides.pptx
@@ -4968,11 +4968,40 @@
                 <a:ea typeface="Malgun Gothic"/>
                 <a:cs typeface="Malgun Gothic"/>
               </a:rPr>
-              <a:t>: 두꺼운 점액이 상피 표면을 덮어 pepsin이 접근하지 못하게 한다. 2. </a:t>
-            </a:r>
+              <a:t>: 두꺼운 점액이 상피 표면을 덮어 pepsin이 접근하지 못하게 한다.</a:t>
+            </a:r>
+          </a:p>
+          <a:p>
+            <a:pPr>
+              <a:spcAft>
+                <a:spcPts val="900"/>
+              </a:spcAft>
+            </a:pPr>
             <a:r>
               <a:rPr sz="1400" b="1" i="0">
                 <a:solidFill>
+                  <a:srgbClr val="F2B705"/>
+                </a:solidFill>
+                <a:latin typeface="Malgun Gothic"/>
+                <a:ea typeface="Malgun Gothic"/>
+                <a:cs typeface="Malgun Gothic"/>
+              </a:rPr>
+              <a:t>•  </a:t>
+            </a:r>
+            <a:r>
+              <a:rPr sz="1400" b="0" i="0">
+                <a:solidFill>
+                  <a:srgbClr val="11202B"/>
+                </a:solidFill>
+                <a:latin typeface="Malgun Gothic"/>
+                <a:ea typeface="Malgun Gothic"/>
+                <a:cs typeface="Malgun Gothic"/>
+              </a:rPr>
+              <a:t>2. </a:t>
+            </a:r>
+            <a:r>
+              <a:rPr sz="1400" b="1" i="0">
+                <a:solidFill>
                   <a:srgbClr val="11202B"/>
                 </a:solidFill>
                 <a:latin typeface="Malgun Gothic"/>
@@ -4990,11 +5019,40 @@
                 <a:ea typeface="Malgun Gothic"/>
                 <a:cs typeface="Malgun Gothic"/>
               </a:rPr>
-              <a:t>: 점액층 안에 HCO₃⁻이 들어 있어 점액 안쪽의 pH를 중성에 가깝게 유지한다. Lumen의 pH가 2일 때 상피 표면의 pH는 7에 가깝다. 3. </a:t>
-            </a:r>
+              <a:t>: 점액층 안에 HCO₃⁻이 들어 있어 점액 안쪽의 pH를 중성에 가깝게 유지한다. Lumen의 pH가 2일 때 상피 표면의 pH는 7에 가깝다.</a:t>
+            </a:r>
+          </a:p>
+          <a:p>
+            <a:pPr>
+              <a:spcAft>
+                <a:spcPts val="900"/>
+              </a:spcAft>
+            </a:pPr>
             <a:r>
               <a:rPr sz="1400" b="1" i="0">
                 <a:solidFill>
+                  <a:srgbClr val="F2B705"/>
+                </a:solidFill>
+                <a:latin typeface="Malgun Gothic"/>
+                <a:ea typeface="Malgun Gothic"/>
+                <a:cs typeface="Malgun Gothic"/>
+              </a:rPr>
+              <a:t>•  </a:t>
+            </a:r>
+            <a:r>
+              <a:rPr sz="1400" b="0" i="0">
+                <a:solidFill>
+                  <a:srgbClr val="11202B"/>
+                </a:solidFill>
+                <a:latin typeface="Malgun Gothic"/>
+                <a:ea typeface="Malgun Gothic"/>
+                <a:cs typeface="Malgun Gothic"/>
+              </a:rPr>
+              <a:t>3. </a:t>
+            </a:r>
+            <a:r>
+              <a:rPr sz="1400" b="1" i="0">
+                <a:solidFill>
                   <a:srgbClr val="11202B"/>
                 </a:solidFill>
                 <a:latin typeface="Malgun Gothic"/>
@@ -5012,11 +5070,40 @@
                 <a:ea typeface="Malgun Gothic"/>
                 <a:cs typeface="Malgun Gothic"/>
               </a:rPr>
-              <a:t>: Tight junction이 산이 세포 사이로 스며드는 것을 막는다. 4. </a:t>
-            </a:r>
+              <a:t>: Tight junction이 산이 세포 사이로 스며드는 것을 막는다.</a:t>
+            </a:r>
+          </a:p>
+          <a:p>
+            <a:pPr>
+              <a:spcAft>
+                <a:spcPts val="900"/>
+              </a:spcAft>
+            </a:pPr>
             <a:r>
               <a:rPr sz="1400" b="1" i="0">
                 <a:solidFill>
+                  <a:srgbClr val="F2B705"/>
+                </a:solidFill>
+                <a:latin typeface="Malgun Gothic"/>
+                <a:ea typeface="Malgun Gothic"/>
+                <a:cs typeface="Malgun Gothic"/>
+              </a:rPr>
+              <a:t>•  </a:t>
+            </a:r>
+            <a:r>
+              <a:rPr sz="1400" b="0" i="0">
+                <a:solidFill>
+                  <a:srgbClr val="11202B"/>
+                </a:solidFill>
+                <a:latin typeface="Malgun Gothic"/>
+                <a:ea typeface="Malgun Gothic"/>
+                <a:cs typeface="Malgun Gothic"/>
+              </a:rPr>
+              <a:t>4. </a:t>
+            </a:r>
+            <a:r>
+              <a:rPr sz="1400" b="1" i="0">
+                <a:solidFill>
                   <a:srgbClr val="11202B"/>
                 </a:solidFill>
                 <a:latin typeface="Malgun Gothic"/>
@@ -5034,7 +5121,36 @@
                 <a:ea typeface="Malgun Gothic"/>
                 <a:cs typeface="Malgun Gothic"/>
               </a:rPr>
-              <a:t>: 위 상피는 3~5일마다 전부 교체된다. 손상된 세포가 빨리 치워진다. 5. </a:t>
+              <a:t>: 위 상피는 3~5일마다 전부 교체된다. 손상된 세포가 빨리 치워진다.</a:t>
+            </a:r>
+          </a:p>
+          <a:p>
+            <a:pPr>
+              <a:spcAft>
+                <a:spcPts val="900"/>
+              </a:spcAft>
+            </a:pPr>
+            <a:r>
+              <a:rPr sz="1400" b="1" i="0">
+                <a:solidFill>
+                  <a:srgbClr val="F2B705"/>
+                </a:solidFill>
+                <a:latin typeface="Malgun Gothic"/>
+                <a:ea typeface="Malgun Gothic"/>
+                <a:cs typeface="Malgun Gothic"/>
+              </a:rPr>
+              <a:t>•  </a:t>
+            </a:r>
+            <a:r>
+              <a:rPr sz="1400" b="0" i="0">
+                <a:solidFill>
+                  <a:srgbClr val="11202B"/>
+                </a:solidFill>
+                <a:latin typeface="Malgun Gothic"/>
+                <a:ea typeface="Malgun Gothic"/>
+                <a:cs typeface="Malgun Gothic"/>
+              </a:rPr>
+              <a:t>5. </a:t>
             </a:r>
             <a:r>
               <a:rPr sz="1400" b="1" i="0">
@@ -10980,11 +11096,40 @@
                 <a:ea typeface="Malgun Gothic"/>
                 <a:cs typeface="Malgun Gothic"/>
               </a:rPr>
-              <a:t>: 점막이 둥글게 접혀 표면적을 약 3배로 늘린다. 2. </a:t>
-            </a:r>
+              <a:t>: 점막이 둥글게 접혀 표면적을 약 3배로 늘린다.</a:t>
+            </a:r>
+          </a:p>
+          <a:p>
+            <a:pPr>
+              <a:spcAft>
+                <a:spcPts val="900"/>
+              </a:spcAft>
+            </a:pPr>
             <a:r>
               <a:rPr sz="1400" b="1" i="0">
                 <a:solidFill>
+                  <a:srgbClr val="F2B705"/>
+                </a:solidFill>
+                <a:latin typeface="Malgun Gothic"/>
+                <a:ea typeface="Malgun Gothic"/>
+                <a:cs typeface="Malgun Gothic"/>
+              </a:rPr>
+              <a:t>•  </a:t>
+            </a:r>
+            <a:r>
+              <a:rPr sz="1400" b="0" i="0">
+                <a:solidFill>
+                  <a:srgbClr val="11202B"/>
+                </a:solidFill>
+                <a:latin typeface="Malgun Gothic"/>
+                <a:ea typeface="Malgun Gothic"/>
+                <a:cs typeface="Malgun Gothic"/>
+              </a:rPr>
+              <a:t>2. </a:t>
+            </a:r>
+            <a:r>
+              <a:rPr sz="1400" b="1" i="0">
+                <a:solidFill>
                   <a:srgbClr val="11202B"/>
                 </a:solidFill>
                 <a:latin typeface="Malgun Gothic"/>
@@ -11002,7 +11147,36 @@
                 <a:ea typeface="Malgun Gothic"/>
                 <a:cs typeface="Malgun Gothic"/>
               </a:rPr>
-              <a:t>: 주름 표면에 손가락 모양 돌기가 돋아 표면적을 약 10배로 늘린다. 3. </a:t>
+              <a:t>: 주름 표면에 손가락 모양 돌기가 돋아 표면적을 약 10배로 늘린다.</a:t>
+            </a:r>
+          </a:p>
+          <a:p>
+            <a:pPr>
+              <a:spcAft>
+                <a:spcPts val="900"/>
+              </a:spcAft>
+            </a:pPr>
+            <a:r>
+              <a:rPr sz="1400" b="1" i="0">
+                <a:solidFill>
+                  <a:srgbClr val="F2B705"/>
+                </a:solidFill>
+                <a:latin typeface="Malgun Gothic"/>
+                <a:ea typeface="Malgun Gothic"/>
+                <a:cs typeface="Malgun Gothic"/>
+              </a:rPr>
+              <a:t>•  </a:t>
+            </a:r>
+            <a:r>
+              <a:rPr sz="1400" b="0" i="0">
+                <a:solidFill>
+                  <a:srgbClr val="11202B"/>
+                </a:solidFill>
+                <a:latin typeface="Malgun Gothic"/>
+                <a:ea typeface="Malgun Gothic"/>
+                <a:cs typeface="Malgun Gothic"/>
+              </a:rPr>
+              <a:t>3. </a:t>
             </a:r>
             <a:r>
               <a:rPr sz="1400" b="1" i="0">
@@ -15997,11 +16171,40 @@
                 <a:ea typeface="Malgun Gothic"/>
                 <a:cs typeface="Malgun Gothic"/>
               </a:rPr>
-              <a:t>: lumen과 닿는 층이다. 상피(흡수와 분비를 담당), 그 아래의 lamina propria(혈관, 림프관, 면역 세포), 얇은 muscularis mucosae로 이루어진다. 2. </a:t>
-            </a:r>
+              <a:t>: lumen과 닿는 층이다. 상피(흡수와 분비를 담당), 그 아래의 lamina propria(혈관, 림프관, 면역 세포), 얇은 muscularis mucosae로 이루어진다.</a:t>
+            </a:r>
+          </a:p>
+          <a:p>
+            <a:pPr>
+              <a:spcAft>
+                <a:spcPts val="900"/>
+              </a:spcAft>
+            </a:pPr>
             <a:r>
               <a:rPr sz="1400" b="1" i="0">
                 <a:solidFill>
+                  <a:srgbClr val="F2B705"/>
+                </a:solidFill>
+                <a:latin typeface="Malgun Gothic"/>
+                <a:ea typeface="Malgun Gothic"/>
+                <a:cs typeface="Malgun Gothic"/>
+              </a:rPr>
+              <a:t>•  </a:t>
+            </a:r>
+            <a:r>
+              <a:rPr sz="1400" b="0" i="0">
+                <a:solidFill>
+                  <a:srgbClr val="11202B"/>
+                </a:solidFill>
+                <a:latin typeface="Malgun Gothic"/>
+                <a:ea typeface="Malgun Gothic"/>
+                <a:cs typeface="Malgun Gothic"/>
+              </a:rPr>
+              <a:t>2. </a:t>
+            </a:r>
+            <a:r>
+              <a:rPr sz="1400" b="1" i="0">
+                <a:solidFill>
                   <a:srgbClr val="11202B"/>
                 </a:solidFill>
                 <a:latin typeface="Malgun Gothic"/>
@@ -16041,11 +16244,40 @@
                 <a:ea typeface="Malgun Gothic"/>
                 <a:cs typeface="Malgun Gothic"/>
               </a:rPr>
-              <a:t> 가 있다. 이 신경얼기는 주로 분비와 국소 혈류를 조절한다. 3. </a:t>
-            </a:r>
+              <a:t> 가 있다. 이 신경얼기는 주로 분비와 국소 혈류를 조절한다.</a:t>
+            </a:r>
+          </a:p>
+          <a:p>
+            <a:pPr>
+              <a:spcAft>
+                <a:spcPts val="900"/>
+              </a:spcAft>
+            </a:pPr>
             <a:r>
               <a:rPr sz="1400" b="1" i="0">
                 <a:solidFill>
+                  <a:srgbClr val="F2B705"/>
+                </a:solidFill>
+                <a:latin typeface="Malgun Gothic"/>
+                <a:ea typeface="Malgun Gothic"/>
+                <a:cs typeface="Malgun Gothic"/>
+              </a:rPr>
+              <a:t>•  </a:t>
+            </a:r>
+            <a:r>
+              <a:rPr sz="1400" b="0" i="0">
+                <a:solidFill>
+                  <a:srgbClr val="11202B"/>
+                </a:solidFill>
+                <a:latin typeface="Malgun Gothic"/>
+                <a:ea typeface="Malgun Gothic"/>
+                <a:cs typeface="Malgun Gothic"/>
+              </a:rPr>
+              <a:t>3. </a:t>
+            </a:r>
+            <a:r>
+              <a:rPr sz="1400" b="1" i="0">
+                <a:solidFill>
                   <a:srgbClr val="11202B"/>
                 </a:solidFill>
                 <a:latin typeface="Malgun Gothic"/>
@@ -16085,7 +16317,36 @@
                 <a:ea typeface="Malgun Gothic"/>
                 <a:cs typeface="Malgun Gothic"/>
               </a:rPr>
-              <a:t> 가 있다. 이 신경얼기는 주로 운동을 조절한다. 4. </a:t>
+              <a:t> 가 있다. 이 신경얼기는 주로 운동을 조절한다.</a:t>
+            </a:r>
+          </a:p>
+          <a:p>
+            <a:pPr>
+              <a:spcAft>
+                <a:spcPts val="900"/>
+              </a:spcAft>
+            </a:pPr>
+            <a:r>
+              <a:rPr sz="1400" b="1" i="0">
+                <a:solidFill>
+                  <a:srgbClr val="F2B705"/>
+                </a:solidFill>
+                <a:latin typeface="Malgun Gothic"/>
+                <a:ea typeface="Malgun Gothic"/>
+                <a:cs typeface="Malgun Gothic"/>
+              </a:rPr>
+              <a:t>•  </a:t>
+            </a:r>
+            <a:r>
+              <a:rPr sz="1400" b="0" i="0">
+                <a:solidFill>
+                  <a:srgbClr val="11202B"/>
+                </a:solidFill>
+                <a:latin typeface="Malgun Gothic"/>
+                <a:ea typeface="Malgun Gothic"/>
+                <a:cs typeface="Malgun Gothic"/>
+              </a:rPr>
+              <a:t>4. </a:t>
             </a:r>
             <a:r>
               <a:rPr sz="1400" b="1" i="0">

--- a/curriculum/M01/W01/L03/slides.pptx
+++ b/curriculum/M01/W01/L03/slides.pptx
@@ -14353,7 +14353,7 @@
                 <a:ea typeface="Malgun Gothic"/>
                 <a:cs typeface="Malgun Gothic"/>
               </a:rPr>
-              <a:t>M01-W01-L01 순환계 요약 — hepatic portal system, 모세혈관 교환</a:t>
+              <a:t>M01-W01-L01 순환계 요약: 심장·혈관·혈류와 항상성 — hepatic portal system, 모세혈관 교환</a:t>
             </a:r>
           </a:p>
           <a:p>
@@ -14382,7 +14382,7 @@
                 <a:ea typeface="Malgun Gothic"/>
                 <a:cs typeface="Malgun Gothic"/>
               </a:rPr>
-              <a:t>M01-W01-L02 호흡계 요약 — 확산과 분압, 표면적과 교환 효율</a:t>
+              <a:t>M01-W01-L02 호흡계 요약: 환기·가스교환·산소 운반 — 확산과 분압, 표면적과 교환 효율</a:t>
             </a:r>
           </a:p>
           <a:p>
